--- a/examples/real_world/_out/10_marketing_campaign.pptx
+++ b/examples/real_world/_out/10_marketing_campaign.pptx
@@ -360,6 +360,14 @@
             <c:spPr>
               <a:solidFill>
                 <a:srgbClr val="3B82F6"/>
+              </a:solidFill>
+            </c:spPr>
+          </c:dPt>
+          <c:dPt>
+            <c:idx val="6"/>
+            <c:spPr>
+              <a:solidFill>
+                <a:srgbClr val="DB2777"/>
               </a:solidFill>
             </c:spPr>
           </c:dPt>

--- a/examples/real_world/_out/10_marketing_campaign.pptx
+++ b/examples/real_world/_out/10_marketing_campaign.pptx
@@ -5655,8 +5655,8 @@
   <p:clrMapOvr>
     <a:masterClrMapping/>
   </p:clrMapOvr>
-  <p:transition xmlns:ns0="http://schemas.microsoft.com/office/powerpoint/2010/main" ns0:dur="400">
-    <p:fade/>
+  <p:transition xmlns:ns0="http://schemas.microsoft.com/office/powerpoint/2010/main" ns0:dur="1200">
+    <ns0:morph/>
   </p:transition>
   <p:timing>
     <p:tnLst>
